--- a/docs/pitch/apresentacao_produto.pptx
+++ b/docs/pitch/apresentacao_produto.pptx
@@ -22,6 +22,7 @@
     <p:sldId id="270" r:id="rId21"/>
     <p:sldId id="271" r:id="rId22"/>
     <p:sldId id="272" r:id="rId23"/>
+    <p:sldId id="273" r:id="rId24"/>
   </p:sldIdLst>
   <p:sldSz cx="12191695" cy="6858000" type="screen4x3"/>
   <p:notesSz cx="6858000" cy="9144000"/>
@@ -5853,7 +5854,7 @@
                 </a:solidFill>
                 <a:latin typeface="Arial"/>
               </a:rPr>
-              <a:t>MERCADO</a:t>
+              <a:t>CAD &amp; 3D</a:t>
             </a:r>
           </a:p>
         </p:txBody>
@@ -5888,7 +5889,7 @@
                 </a:solidFill>
                 <a:latin typeface="Arial"/>
               </a:rPr>
-              <a:t>Onde o Tupan faz diferença</a:t>
+              <a:t>Geometria gerada do mesmo modelo paramétrico</a:t>
             </a:r>
           </a:p>
         </p:txBody>
@@ -5936,145 +5937,137 @@
           </a:p>
         </p:txBody>
       </p:sp>
-      <p:sp>
-        <p:nvSpPr>
-          <p:cNvPr id="5" name="Rounded Rectangle 4"/>
-          <p:cNvSpPr/>
-          <p:nvPr/>
-        </p:nvSpPr>
-        <p:spPr>
-          <a:xfrm>
-            <a:off x="731520" y="1737360"/>
-            <a:ext cx="2377440" cy="731520"/>
-          </a:xfrm>
-          <a:prstGeom prst="roundRect">
-            <a:avLst/>
-          </a:prstGeom>
-          <a:solidFill>
-            <a:srgbClr val="2E7D32"/>
-          </a:solidFill>
-          <a:ln>
-            <a:solidFill>
-              <a:srgbClr val="2E7D32"/>
-            </a:solidFill>
-          </a:ln>
-        </p:spPr>
-        <p:style>
-          <a:lnRef idx="1">
-            <a:schemeClr val="accent1"/>
-          </a:lnRef>
-          <a:fillRef idx="3">
-            <a:schemeClr val="accent1"/>
-          </a:fillRef>
-          <a:effectRef idx="2">
-            <a:schemeClr val="accent1"/>
-          </a:effectRef>
-          <a:fontRef idx="minor">
-            <a:schemeClr val="lt1"/>
-          </a:fontRef>
-        </p:style>
-        <p:txBody>
-          <a:bodyPr rtlCol="0" anchor="ctr" wrap="square" lIns="73152" rIns="73152"/>
-          <a:lstStyle/>
-          <a:p>
-            <a:pPr algn="ctr"/>
-            <a:r>
-              <a:rPr sz="1700" b="1">
-                <a:solidFill>
-                  <a:srgbClr val="FFFFFF"/>
-                </a:solidFill>
-                <a:latin typeface="Arial"/>
-              </a:rPr>
-              <a:t>COMUNIDADES</a:t>
-            </a:r>
-          </a:p>
-        </p:txBody>
-      </p:sp>
-      <p:sp>
-        <p:nvSpPr>
-          <p:cNvPr id="6" name="TextBox 5"/>
-          <p:cNvSpPr txBox="1"/>
-          <p:nvPr/>
-        </p:nvSpPr>
-        <p:spPr>
-          <a:xfrm>
-            <a:off x="3291839" y="1847088"/>
-            <a:ext cx="2743200" cy="548640"/>
-          </a:xfrm>
-          <a:prstGeom prst="rect">
-            <a:avLst/>
-          </a:prstGeom>
-          <a:noFill/>
-        </p:spPr>
-        <p:txBody>
-          <a:bodyPr wrap="square" lIns="45720" rIns="45720" tIns="18288" bIns="18288">
-            <a:spAutoFit/>
-          </a:bodyPr>
-          <a:lstStyle/>
-          <a:p>
-            <a:pPr algn="l"/>
-            <a:r>
-              <a:rPr sz="1400" b="0" i="0">
+      <p:pic>
+        <p:nvPicPr>
+          <p:cNvPr id="5" name="Picture 4" descr="tupan_cad.png"/>
+          <p:cNvPicPr>
+            <a:picLocks noChangeAspect="1"/>
+          </p:cNvPicPr>
+          <p:nvPr/>
+        </p:nvPicPr>
+        <p:blipFill>
+          <a:blip r:embed="rId2"/>
+          <a:stretch>
+            <a:fillRect/>
+          </a:stretch>
+        </p:blipFill>
+        <p:spPr>
+          <a:xfrm>
+            <a:off x="365760" y="1600200"/>
+            <a:ext cx="6400800" cy="2724498"/>
+          </a:xfrm>
+          <a:prstGeom prst="rect">
+            <a:avLst/>
+          </a:prstGeom>
+        </p:spPr>
+      </p:pic>
+      <p:pic>
+        <p:nvPicPr>
+          <p:cNvPr id="6" name="Picture 5" descr="esquema_eletrico.png"/>
+          <p:cNvPicPr>
+            <a:picLocks noChangeAspect="1"/>
+          </p:cNvPicPr>
+          <p:nvPr/>
+        </p:nvPicPr>
+        <p:blipFill>
+          <a:blip r:embed="rId3"/>
+          <a:stretch>
+            <a:fillRect/>
+          </a:stretch>
+        </p:blipFill>
+        <p:spPr>
+          <a:xfrm>
+            <a:off x="7040880" y="1600200"/>
+            <a:ext cx="4754880" cy="3386569"/>
+          </a:xfrm>
+          <a:prstGeom prst="rect">
+            <a:avLst/>
+          </a:prstGeom>
+        </p:spPr>
+      </p:pic>
+      <p:sp>
+        <p:nvSpPr>
+          <p:cNvPr id="7" name="TextBox 6"/>
+          <p:cNvSpPr txBox="1"/>
+          <p:nvPr/>
+        </p:nvSpPr>
+        <p:spPr>
+          <a:xfrm>
+            <a:off x="548640" y="5532120"/>
+            <a:ext cx="11155680" cy="914400"/>
+          </a:xfrm>
+          <a:prstGeom prst="rect">
+            <a:avLst/>
+          </a:prstGeom>
+          <a:noFill/>
+        </p:spPr>
+        <p:txBody>
+          <a:bodyPr wrap="square">
+            <a:spAutoFit/>
+          </a:bodyPr>
+          <a:lstStyle/>
+          <a:p>
+            <a:pPr>
+              <a:spcAft>
+                <a:spcPts val="168"/>
+              </a:spcAft>
+            </a:pPr>
+            <a:r>
+              <a:rPr sz="1200">
                 <a:solidFill>
                   <a:srgbClr val="595959"/>
                 </a:solidFill>
                 <a:latin typeface="Arial"/>
               </a:rPr>
-              <a:t>Semiárido, vilarejos, assentamentos</a:t>
-            </a:r>
-          </a:p>
-        </p:txBody>
-      </p:sp>
-      <p:sp>
-        <p:nvSpPr>
-          <p:cNvPr id="7" name="Rounded Rectangle 6"/>
-          <p:cNvSpPr/>
-          <p:nvPr/>
-        </p:nvSpPr>
-        <p:spPr>
-          <a:xfrm>
-            <a:off x="6217920" y="1737360"/>
-            <a:ext cx="2377440" cy="731520"/>
-          </a:xfrm>
-          <a:prstGeom prst="roundRect">
-            <a:avLst/>
-          </a:prstGeom>
-          <a:solidFill>
-            <a:srgbClr val="4070A0"/>
-          </a:solidFill>
-          <a:ln>
-            <a:solidFill>
-              <a:srgbClr val="4070A0"/>
-            </a:solidFill>
-          </a:ln>
-        </p:spPr>
-        <p:style>
-          <a:lnRef idx="1">
-            <a:schemeClr val="accent1"/>
-          </a:lnRef>
-          <a:fillRef idx="3">
-            <a:schemeClr val="accent1"/>
-          </a:fillRef>
-          <a:effectRef idx="2">
-            <a:schemeClr val="accent1"/>
-          </a:effectRef>
-          <a:fontRef idx="minor">
-            <a:schemeClr val="lt1"/>
-          </a:fontRef>
-        </p:style>
-        <p:txBody>
-          <a:bodyPr rtlCol="0" anchor="ctr" wrap="square" lIns="73152" rIns="73152"/>
-          <a:lstStyle/>
-          <a:p>
-            <a:pPr algn="ctr"/>
-            <a:r>
-              <a:rPr sz="1700" b="1">
-                <a:solidFill>
-                  <a:srgbClr val="FFFFFF"/>
-                </a:solidFill>
-                <a:latin typeface="Arial"/>
-              </a:rPr>
-              <a:t>EXPEDIÇÕES</a:t>
+              <a:t>• tupan_cad.png: vistas frontal/superior/lateral (carcaça 34×24×32 cm)</a:t>
+            </a:r>
+          </a:p>
+          <a:p>
+            <a:pPr>
+              <a:spcAft>
+                <a:spcPts val="168"/>
+              </a:spcAft>
+            </a:pPr>
+            <a:r>
+              <a:rPr sz="1200">
+                <a:solidFill>
+                  <a:srgbClr val="595959"/>
+                </a:solidFill>
+                <a:latin typeface="Arial"/>
+              </a:rPr>
+              <a:t>• tupan_pecas.stl: malha 3D exibida no Tupan Studio</a:t>
+            </a:r>
+          </a:p>
+          <a:p>
+            <a:pPr>
+              <a:spcAft>
+                <a:spcPts val="168"/>
+              </a:spcAft>
+            </a:pPr>
+            <a:r>
+              <a:rPr sz="1200">
+                <a:solidFill>
+                  <a:srgbClr val="595959"/>
+                </a:solidFill>
+                <a:latin typeface="Arial"/>
+              </a:rPr>
+              <a:t>• tupan.scad: modelo paramétrico OpenSCAD; DXF para desenho técnico</a:t>
+            </a:r>
+          </a:p>
+          <a:p>
+            <a:pPr>
+              <a:spcAft>
+                <a:spcPts val="168"/>
+              </a:spcAft>
+            </a:pPr>
+            <a:r>
+              <a:rPr sz="1200">
+                <a:solidFill>
+                  <a:srgbClr val="595959"/>
+                </a:solidFill>
+                <a:latin typeface="Arial"/>
+              </a:rPr>
+              <a:t>• esquema elétrico em PNG/SVG (Arduino Mega + sensores + atuadores)</a:t>
             </a:r>
           </a:p>
         </p:txBody>
@@ -6082,273 +6075,6 @@
       <p:sp>
         <p:nvSpPr>
           <p:cNvPr id="8" name="TextBox 7"/>
-          <p:cNvSpPr txBox="1"/>
-          <p:nvPr/>
-        </p:nvSpPr>
-        <p:spPr>
-          <a:xfrm>
-            <a:off x="8778240" y="1847088"/>
-            <a:ext cx="2743200" cy="548640"/>
-          </a:xfrm>
-          <a:prstGeom prst="rect">
-            <a:avLst/>
-          </a:prstGeom>
-          <a:noFill/>
-        </p:spPr>
-        <p:txBody>
-          <a:bodyPr wrap="square" lIns="45720" rIns="45720" tIns="18288" bIns="18288">
-            <a:spAutoFit/>
-          </a:bodyPr>
-          <a:lstStyle/>
-          <a:p>
-            <a:pPr algn="l"/>
-            <a:r>
-              <a:rPr sz="1400" b="0" i="0">
-                <a:solidFill>
-                  <a:srgbClr val="595959"/>
-                </a:solidFill>
-                <a:latin typeface="Arial"/>
-              </a:rPr>
-              <a:t>Trilhas, acampamentos, áreas remotas</a:t>
-            </a:r>
-          </a:p>
-        </p:txBody>
-      </p:sp>
-      <p:sp>
-        <p:nvSpPr>
-          <p:cNvPr id="9" name="Rounded Rectangle 8"/>
-          <p:cNvSpPr/>
-          <p:nvPr/>
-        </p:nvSpPr>
-        <p:spPr>
-          <a:xfrm>
-            <a:off x="731520" y="3931920"/>
-            <a:ext cx="2377440" cy="731520"/>
-          </a:xfrm>
-          <a:prstGeom prst="roundRect">
-            <a:avLst/>
-          </a:prstGeom>
-          <a:solidFill>
-            <a:srgbClr val="E65100"/>
-          </a:solidFill>
-          <a:ln>
-            <a:solidFill>
-              <a:srgbClr val="E65100"/>
-            </a:solidFill>
-          </a:ln>
-        </p:spPr>
-        <p:style>
-          <a:lnRef idx="1">
-            <a:schemeClr val="accent1"/>
-          </a:lnRef>
-          <a:fillRef idx="3">
-            <a:schemeClr val="accent1"/>
-          </a:fillRef>
-          <a:effectRef idx="2">
-            <a:schemeClr val="accent1"/>
-          </a:effectRef>
-          <a:fontRef idx="minor">
-            <a:schemeClr val="lt1"/>
-          </a:fontRef>
-        </p:style>
-        <p:txBody>
-          <a:bodyPr rtlCol="0" anchor="ctr" wrap="square" lIns="73152" rIns="73152"/>
-          <a:lstStyle/>
-          <a:p>
-            <a:pPr algn="ctr"/>
-            <a:r>
-              <a:rPr sz="1700" b="1">
-                <a:solidFill>
-                  <a:srgbClr val="FFFFFF"/>
-                </a:solidFill>
-                <a:latin typeface="Arial"/>
-              </a:rPr>
-              <a:t>EMERGÊNCIA</a:t>
-            </a:r>
-          </a:p>
-        </p:txBody>
-      </p:sp>
-      <p:sp>
-        <p:nvSpPr>
-          <p:cNvPr id="10" name="TextBox 9"/>
-          <p:cNvSpPr txBox="1"/>
-          <p:nvPr/>
-        </p:nvSpPr>
-        <p:spPr>
-          <a:xfrm>
-            <a:off x="3291839" y="4041648"/>
-            <a:ext cx="2743200" cy="548640"/>
-          </a:xfrm>
-          <a:prstGeom prst="rect">
-            <a:avLst/>
-          </a:prstGeom>
-          <a:noFill/>
-        </p:spPr>
-        <p:txBody>
-          <a:bodyPr wrap="square" lIns="45720" rIns="45720" tIns="18288" bIns="18288">
-            <a:spAutoFit/>
-          </a:bodyPr>
-          <a:lstStyle/>
-          <a:p>
-            <a:pPr algn="l"/>
-            <a:r>
-              <a:rPr sz="1400" b="0" i="0">
-                <a:solidFill>
-                  <a:srgbClr val="595959"/>
-                </a:solidFill>
-                <a:latin typeface="Arial"/>
-              </a:rPr>
-              <a:t>Desastres naturais e crise hídrica</a:t>
-            </a:r>
-          </a:p>
-        </p:txBody>
-      </p:sp>
-      <p:sp>
-        <p:nvSpPr>
-          <p:cNvPr id="11" name="Rounded Rectangle 10"/>
-          <p:cNvSpPr/>
-          <p:nvPr/>
-        </p:nvSpPr>
-        <p:spPr>
-          <a:xfrm>
-            <a:off x="6217920" y="3931920"/>
-            <a:ext cx="2377440" cy="731520"/>
-          </a:xfrm>
-          <a:prstGeom prst="roundRect">
-            <a:avLst/>
-          </a:prstGeom>
-          <a:solidFill>
-            <a:srgbClr val="1E3A5F"/>
-          </a:solidFill>
-          <a:ln>
-            <a:solidFill>
-              <a:srgbClr val="1E3A5F"/>
-            </a:solidFill>
-          </a:ln>
-        </p:spPr>
-        <p:style>
-          <a:lnRef idx="1">
-            <a:schemeClr val="accent1"/>
-          </a:lnRef>
-          <a:fillRef idx="3">
-            <a:schemeClr val="accent1"/>
-          </a:fillRef>
-          <a:effectRef idx="2">
-            <a:schemeClr val="accent1"/>
-          </a:effectRef>
-          <a:fontRef idx="minor">
-            <a:schemeClr val="lt1"/>
-          </a:fontRef>
-        </p:style>
-        <p:txBody>
-          <a:bodyPr rtlCol="0" anchor="ctr" wrap="square" lIns="73152" rIns="73152"/>
-          <a:lstStyle/>
-          <a:p>
-            <a:pPr algn="ctr"/>
-            <a:r>
-              <a:rPr sz="1700" b="1">
-                <a:solidFill>
-                  <a:srgbClr val="FFFFFF"/>
-                </a:solidFill>
-                <a:latin typeface="Arial"/>
-              </a:rPr>
-              <a:t>RESIDENCIAL</a:t>
-            </a:r>
-          </a:p>
-        </p:txBody>
-      </p:sp>
-      <p:sp>
-        <p:nvSpPr>
-          <p:cNvPr id="12" name="TextBox 11"/>
-          <p:cNvSpPr txBox="1"/>
-          <p:nvPr/>
-        </p:nvSpPr>
-        <p:spPr>
-          <a:xfrm>
-            <a:off x="8778240" y="4041648"/>
-            <a:ext cx="2743200" cy="548640"/>
-          </a:xfrm>
-          <a:prstGeom prst="rect">
-            <a:avLst/>
-          </a:prstGeom>
-          <a:noFill/>
-        </p:spPr>
-        <p:txBody>
-          <a:bodyPr wrap="square" lIns="45720" rIns="45720" tIns="18288" bIns="18288">
-            <a:spAutoFit/>
-          </a:bodyPr>
-          <a:lstStyle/>
-          <a:p>
-            <a:pPr algn="l"/>
-            <a:r>
-              <a:rPr sz="1400" b="0" i="0">
-                <a:solidFill>
-                  <a:srgbClr val="595959"/>
-                </a:solidFill>
-                <a:latin typeface="Arial"/>
-              </a:rPr>
-              <a:t>Casas, chácaras e uso diário</a:t>
-            </a:r>
-          </a:p>
-        </p:txBody>
-      </p:sp>
-      <p:sp>
-        <p:nvSpPr>
-          <p:cNvPr id="13" name="Rounded Rectangle 12"/>
-          <p:cNvSpPr/>
-          <p:nvPr/>
-        </p:nvSpPr>
-        <p:spPr>
-          <a:xfrm>
-            <a:off x="2743200" y="5669280"/>
-            <a:ext cx="6675120" cy="731520"/>
-          </a:xfrm>
-          <a:prstGeom prst="roundRect">
-            <a:avLst/>
-          </a:prstGeom>
-          <a:solidFill>
-            <a:srgbClr val="DCEAF7"/>
-          </a:solidFill>
-          <a:ln>
-            <a:solidFill>
-              <a:srgbClr val="DCEAF7"/>
-            </a:solidFill>
-          </a:ln>
-        </p:spPr>
-        <p:style>
-          <a:lnRef idx="1">
-            <a:schemeClr val="accent1"/>
-          </a:lnRef>
-          <a:fillRef idx="3">
-            <a:schemeClr val="accent1"/>
-          </a:fillRef>
-          <a:effectRef idx="2">
-            <a:schemeClr val="accent1"/>
-          </a:effectRef>
-          <a:fontRef idx="minor">
-            <a:schemeClr val="lt1"/>
-          </a:fontRef>
-        </p:style>
-        <p:txBody>
-          <a:bodyPr rtlCol="0" anchor="ctr" wrap="square" lIns="73152" rIns="73152"/>
-          <a:lstStyle/>
-          <a:p>
-            <a:pPr algn="ctr"/>
-            <a:r>
-              <a:rPr sz="1700" b="1">
-                <a:solidFill>
-                  <a:srgbClr val="1E3A5F"/>
-                </a:solidFill>
-                <a:latin typeface="Arial"/>
-              </a:rPr>
-              <a:t>1 a 2 pessoas por ciclo · foco em consumo humano direto</a:t>
-            </a:r>
-          </a:p>
-        </p:txBody>
-      </p:sp>
-      <p:sp>
-        <p:nvSpPr>
-          <p:cNvPr id="14" name="TextBox 13"/>
           <p:cNvSpPr txBox="1"/>
           <p:nvPr/>
         </p:nvSpPr>
@@ -6383,7 +6109,7 @@
       </p:sp>
       <p:sp>
         <p:nvSpPr>
-          <p:cNvPr id="15" name="TextBox 14"/>
+          <p:cNvPr id="9" name="TextBox 8"/>
           <p:cNvSpPr txBox="1"/>
           <p:nvPr/>
         </p:nvSpPr>
@@ -6425,6 +6151,625 @@
 </file>
 
 <file path=ppt/slides/slide17.xml><?xml version="1.0" encoding="utf-8"?>
+<p:sld xmlns:a="http://schemas.openxmlformats.org/drawingml/2006/main" xmlns:p="http://schemas.openxmlformats.org/presentationml/2006/main" xmlns:r="http://schemas.openxmlformats.org/officeDocument/2006/relationships">
+  <p:cSld>
+    <p:bg>
+      <p:bgPr>
+        <a:solidFill>
+          <a:srgbClr val="FFFFFF"/>
+        </a:solidFill>
+        <a:effectLst/>
+      </p:bgPr>
+    </p:bg>
+    <p:spTree>
+      <p:nvGrpSpPr>
+        <p:cNvPr id="1" name=""/>
+        <p:cNvGrpSpPr/>
+        <p:nvPr/>
+      </p:nvGrpSpPr>
+      <p:grpSpPr/>
+      <p:sp>
+        <p:nvSpPr>
+          <p:cNvPr id="2" name="TextBox 1"/>
+          <p:cNvSpPr txBox="1"/>
+          <p:nvPr/>
+        </p:nvSpPr>
+        <p:spPr>
+          <a:xfrm>
+            <a:off x="548640" y="320040"/>
+            <a:ext cx="10972800" cy="640080"/>
+          </a:xfrm>
+          <a:prstGeom prst="rect">
+            <a:avLst/>
+          </a:prstGeom>
+          <a:noFill/>
+        </p:spPr>
+        <p:txBody>
+          <a:bodyPr wrap="square" lIns="45720" rIns="45720" tIns="18288" bIns="18288">
+            <a:spAutoFit/>
+          </a:bodyPr>
+          <a:lstStyle/>
+          <a:p>
+            <a:pPr algn="l"/>
+            <a:r>
+              <a:rPr sz="3000" b="1" i="0">
+                <a:solidFill>
+                  <a:srgbClr val="1E3A5F"/>
+                </a:solidFill>
+                <a:latin typeface="Arial"/>
+              </a:rPr>
+              <a:t>MERCADO</a:t>
+            </a:r>
+          </a:p>
+        </p:txBody>
+      </p:sp>
+      <p:sp>
+        <p:nvSpPr>
+          <p:cNvPr id="3" name="TextBox 2"/>
+          <p:cNvSpPr txBox="1"/>
+          <p:nvPr/>
+        </p:nvSpPr>
+        <p:spPr>
+          <a:xfrm>
+            <a:off x="566928" y="960120"/>
+            <a:ext cx="10972800" cy="365760"/>
+          </a:xfrm>
+          <a:prstGeom prst="rect">
+            <a:avLst/>
+          </a:prstGeom>
+          <a:noFill/>
+        </p:spPr>
+        <p:txBody>
+          <a:bodyPr wrap="square" lIns="45720" rIns="45720" tIns="18288" bIns="18288">
+            <a:spAutoFit/>
+          </a:bodyPr>
+          <a:lstStyle/>
+          <a:p>
+            <a:pPr algn="l"/>
+            <a:r>
+              <a:rPr sz="1300" b="0" i="1">
+                <a:solidFill>
+                  <a:srgbClr val="595959"/>
+                </a:solidFill>
+                <a:latin typeface="Arial"/>
+              </a:rPr>
+              <a:t>Onde o Tupan faz diferença</a:t>
+            </a:r>
+          </a:p>
+        </p:txBody>
+      </p:sp>
+      <p:sp>
+        <p:nvSpPr>
+          <p:cNvPr id="4" name="Rectangle 3"/>
+          <p:cNvSpPr/>
+          <p:nvPr/>
+        </p:nvSpPr>
+        <p:spPr>
+          <a:xfrm>
+            <a:off x="548640" y="1325880"/>
+            <a:ext cx="1097280" cy="73152"/>
+          </a:xfrm>
+          <a:prstGeom prst="rect">
+            <a:avLst/>
+          </a:prstGeom>
+          <a:solidFill>
+            <a:srgbClr val="2E7D32"/>
+          </a:solidFill>
+          <a:ln>
+            <a:noFill/>
+          </a:ln>
+        </p:spPr>
+        <p:style>
+          <a:lnRef idx="1">
+            <a:schemeClr val="accent1"/>
+          </a:lnRef>
+          <a:fillRef idx="3">
+            <a:schemeClr val="accent1"/>
+          </a:fillRef>
+          <a:effectRef idx="2">
+            <a:schemeClr val="accent1"/>
+          </a:effectRef>
+          <a:fontRef idx="minor">
+            <a:schemeClr val="lt1"/>
+          </a:fontRef>
+        </p:style>
+        <p:txBody>
+          <a:bodyPr rtlCol="0" anchor="ctr"/>
+          <a:lstStyle/>
+          <a:p>
+            <a:pPr algn="ctr"/>
+          </a:p>
+        </p:txBody>
+      </p:sp>
+      <p:sp>
+        <p:nvSpPr>
+          <p:cNvPr id="5" name="Rounded Rectangle 4"/>
+          <p:cNvSpPr/>
+          <p:nvPr/>
+        </p:nvSpPr>
+        <p:spPr>
+          <a:xfrm>
+            <a:off x="731520" y="1737360"/>
+            <a:ext cx="2377440" cy="731520"/>
+          </a:xfrm>
+          <a:prstGeom prst="roundRect">
+            <a:avLst/>
+          </a:prstGeom>
+          <a:solidFill>
+            <a:srgbClr val="2E7D32"/>
+          </a:solidFill>
+          <a:ln>
+            <a:solidFill>
+              <a:srgbClr val="2E7D32"/>
+            </a:solidFill>
+          </a:ln>
+        </p:spPr>
+        <p:style>
+          <a:lnRef idx="1">
+            <a:schemeClr val="accent1"/>
+          </a:lnRef>
+          <a:fillRef idx="3">
+            <a:schemeClr val="accent1"/>
+          </a:fillRef>
+          <a:effectRef idx="2">
+            <a:schemeClr val="accent1"/>
+          </a:effectRef>
+          <a:fontRef idx="minor">
+            <a:schemeClr val="lt1"/>
+          </a:fontRef>
+        </p:style>
+        <p:txBody>
+          <a:bodyPr rtlCol="0" anchor="ctr" wrap="square" lIns="73152" rIns="73152"/>
+          <a:lstStyle/>
+          <a:p>
+            <a:pPr algn="ctr"/>
+            <a:r>
+              <a:rPr sz="1700" b="1">
+                <a:solidFill>
+                  <a:srgbClr val="FFFFFF"/>
+                </a:solidFill>
+                <a:latin typeface="Arial"/>
+              </a:rPr>
+              <a:t>COMUNIDADES</a:t>
+            </a:r>
+          </a:p>
+        </p:txBody>
+      </p:sp>
+      <p:sp>
+        <p:nvSpPr>
+          <p:cNvPr id="6" name="TextBox 5"/>
+          <p:cNvSpPr txBox="1"/>
+          <p:nvPr/>
+        </p:nvSpPr>
+        <p:spPr>
+          <a:xfrm>
+            <a:off x="3291839" y="1847088"/>
+            <a:ext cx="2743200" cy="548640"/>
+          </a:xfrm>
+          <a:prstGeom prst="rect">
+            <a:avLst/>
+          </a:prstGeom>
+          <a:noFill/>
+        </p:spPr>
+        <p:txBody>
+          <a:bodyPr wrap="square" lIns="45720" rIns="45720" tIns="18288" bIns="18288">
+            <a:spAutoFit/>
+          </a:bodyPr>
+          <a:lstStyle/>
+          <a:p>
+            <a:pPr algn="l"/>
+            <a:r>
+              <a:rPr sz="1400" b="0" i="0">
+                <a:solidFill>
+                  <a:srgbClr val="595959"/>
+                </a:solidFill>
+                <a:latin typeface="Arial"/>
+              </a:rPr>
+              <a:t>Semiárido, vilarejos, assentamentos</a:t>
+            </a:r>
+          </a:p>
+        </p:txBody>
+      </p:sp>
+      <p:sp>
+        <p:nvSpPr>
+          <p:cNvPr id="7" name="Rounded Rectangle 6"/>
+          <p:cNvSpPr/>
+          <p:nvPr/>
+        </p:nvSpPr>
+        <p:spPr>
+          <a:xfrm>
+            <a:off x="6217920" y="1737360"/>
+            <a:ext cx="2377440" cy="731520"/>
+          </a:xfrm>
+          <a:prstGeom prst="roundRect">
+            <a:avLst/>
+          </a:prstGeom>
+          <a:solidFill>
+            <a:srgbClr val="4070A0"/>
+          </a:solidFill>
+          <a:ln>
+            <a:solidFill>
+              <a:srgbClr val="4070A0"/>
+            </a:solidFill>
+          </a:ln>
+        </p:spPr>
+        <p:style>
+          <a:lnRef idx="1">
+            <a:schemeClr val="accent1"/>
+          </a:lnRef>
+          <a:fillRef idx="3">
+            <a:schemeClr val="accent1"/>
+          </a:fillRef>
+          <a:effectRef idx="2">
+            <a:schemeClr val="accent1"/>
+          </a:effectRef>
+          <a:fontRef idx="minor">
+            <a:schemeClr val="lt1"/>
+          </a:fontRef>
+        </p:style>
+        <p:txBody>
+          <a:bodyPr rtlCol="0" anchor="ctr" wrap="square" lIns="73152" rIns="73152"/>
+          <a:lstStyle/>
+          <a:p>
+            <a:pPr algn="ctr"/>
+            <a:r>
+              <a:rPr sz="1700" b="1">
+                <a:solidFill>
+                  <a:srgbClr val="FFFFFF"/>
+                </a:solidFill>
+                <a:latin typeface="Arial"/>
+              </a:rPr>
+              <a:t>EXPEDIÇÕES</a:t>
+            </a:r>
+          </a:p>
+        </p:txBody>
+      </p:sp>
+      <p:sp>
+        <p:nvSpPr>
+          <p:cNvPr id="8" name="TextBox 7"/>
+          <p:cNvSpPr txBox="1"/>
+          <p:nvPr/>
+        </p:nvSpPr>
+        <p:spPr>
+          <a:xfrm>
+            <a:off x="8778240" y="1847088"/>
+            <a:ext cx="2743200" cy="548640"/>
+          </a:xfrm>
+          <a:prstGeom prst="rect">
+            <a:avLst/>
+          </a:prstGeom>
+          <a:noFill/>
+        </p:spPr>
+        <p:txBody>
+          <a:bodyPr wrap="square" lIns="45720" rIns="45720" tIns="18288" bIns="18288">
+            <a:spAutoFit/>
+          </a:bodyPr>
+          <a:lstStyle/>
+          <a:p>
+            <a:pPr algn="l"/>
+            <a:r>
+              <a:rPr sz="1400" b="0" i="0">
+                <a:solidFill>
+                  <a:srgbClr val="595959"/>
+                </a:solidFill>
+                <a:latin typeface="Arial"/>
+              </a:rPr>
+              <a:t>Trilhas, acampamentos, áreas remotas</a:t>
+            </a:r>
+          </a:p>
+        </p:txBody>
+      </p:sp>
+      <p:sp>
+        <p:nvSpPr>
+          <p:cNvPr id="9" name="Rounded Rectangle 8"/>
+          <p:cNvSpPr/>
+          <p:nvPr/>
+        </p:nvSpPr>
+        <p:spPr>
+          <a:xfrm>
+            <a:off x="731520" y="3931920"/>
+            <a:ext cx="2377440" cy="731520"/>
+          </a:xfrm>
+          <a:prstGeom prst="roundRect">
+            <a:avLst/>
+          </a:prstGeom>
+          <a:solidFill>
+            <a:srgbClr val="E65100"/>
+          </a:solidFill>
+          <a:ln>
+            <a:solidFill>
+              <a:srgbClr val="E65100"/>
+            </a:solidFill>
+          </a:ln>
+        </p:spPr>
+        <p:style>
+          <a:lnRef idx="1">
+            <a:schemeClr val="accent1"/>
+          </a:lnRef>
+          <a:fillRef idx="3">
+            <a:schemeClr val="accent1"/>
+          </a:fillRef>
+          <a:effectRef idx="2">
+            <a:schemeClr val="accent1"/>
+          </a:effectRef>
+          <a:fontRef idx="minor">
+            <a:schemeClr val="lt1"/>
+          </a:fontRef>
+        </p:style>
+        <p:txBody>
+          <a:bodyPr rtlCol="0" anchor="ctr" wrap="square" lIns="73152" rIns="73152"/>
+          <a:lstStyle/>
+          <a:p>
+            <a:pPr algn="ctr"/>
+            <a:r>
+              <a:rPr sz="1700" b="1">
+                <a:solidFill>
+                  <a:srgbClr val="FFFFFF"/>
+                </a:solidFill>
+                <a:latin typeface="Arial"/>
+              </a:rPr>
+              <a:t>EMERGÊNCIA</a:t>
+            </a:r>
+          </a:p>
+        </p:txBody>
+      </p:sp>
+      <p:sp>
+        <p:nvSpPr>
+          <p:cNvPr id="10" name="TextBox 9"/>
+          <p:cNvSpPr txBox="1"/>
+          <p:nvPr/>
+        </p:nvSpPr>
+        <p:spPr>
+          <a:xfrm>
+            <a:off x="3291839" y="4041648"/>
+            <a:ext cx="2743200" cy="548640"/>
+          </a:xfrm>
+          <a:prstGeom prst="rect">
+            <a:avLst/>
+          </a:prstGeom>
+          <a:noFill/>
+        </p:spPr>
+        <p:txBody>
+          <a:bodyPr wrap="square" lIns="45720" rIns="45720" tIns="18288" bIns="18288">
+            <a:spAutoFit/>
+          </a:bodyPr>
+          <a:lstStyle/>
+          <a:p>
+            <a:pPr algn="l"/>
+            <a:r>
+              <a:rPr sz="1400" b="0" i="0">
+                <a:solidFill>
+                  <a:srgbClr val="595959"/>
+                </a:solidFill>
+                <a:latin typeface="Arial"/>
+              </a:rPr>
+              <a:t>Desastres naturais e crise hídrica</a:t>
+            </a:r>
+          </a:p>
+        </p:txBody>
+      </p:sp>
+      <p:sp>
+        <p:nvSpPr>
+          <p:cNvPr id="11" name="Rounded Rectangle 10"/>
+          <p:cNvSpPr/>
+          <p:nvPr/>
+        </p:nvSpPr>
+        <p:spPr>
+          <a:xfrm>
+            <a:off x="6217920" y="3931920"/>
+            <a:ext cx="2377440" cy="731520"/>
+          </a:xfrm>
+          <a:prstGeom prst="roundRect">
+            <a:avLst/>
+          </a:prstGeom>
+          <a:solidFill>
+            <a:srgbClr val="1E3A5F"/>
+          </a:solidFill>
+          <a:ln>
+            <a:solidFill>
+              <a:srgbClr val="1E3A5F"/>
+            </a:solidFill>
+          </a:ln>
+        </p:spPr>
+        <p:style>
+          <a:lnRef idx="1">
+            <a:schemeClr val="accent1"/>
+          </a:lnRef>
+          <a:fillRef idx="3">
+            <a:schemeClr val="accent1"/>
+          </a:fillRef>
+          <a:effectRef idx="2">
+            <a:schemeClr val="accent1"/>
+          </a:effectRef>
+          <a:fontRef idx="minor">
+            <a:schemeClr val="lt1"/>
+          </a:fontRef>
+        </p:style>
+        <p:txBody>
+          <a:bodyPr rtlCol="0" anchor="ctr" wrap="square" lIns="73152" rIns="73152"/>
+          <a:lstStyle/>
+          <a:p>
+            <a:pPr algn="ctr"/>
+            <a:r>
+              <a:rPr sz="1700" b="1">
+                <a:solidFill>
+                  <a:srgbClr val="FFFFFF"/>
+                </a:solidFill>
+                <a:latin typeface="Arial"/>
+              </a:rPr>
+              <a:t>RESIDENCIAL</a:t>
+            </a:r>
+          </a:p>
+        </p:txBody>
+      </p:sp>
+      <p:sp>
+        <p:nvSpPr>
+          <p:cNvPr id="12" name="TextBox 11"/>
+          <p:cNvSpPr txBox="1"/>
+          <p:nvPr/>
+        </p:nvSpPr>
+        <p:spPr>
+          <a:xfrm>
+            <a:off x="8778240" y="4041648"/>
+            <a:ext cx="2743200" cy="548640"/>
+          </a:xfrm>
+          <a:prstGeom prst="rect">
+            <a:avLst/>
+          </a:prstGeom>
+          <a:noFill/>
+        </p:spPr>
+        <p:txBody>
+          <a:bodyPr wrap="square" lIns="45720" rIns="45720" tIns="18288" bIns="18288">
+            <a:spAutoFit/>
+          </a:bodyPr>
+          <a:lstStyle/>
+          <a:p>
+            <a:pPr algn="l"/>
+            <a:r>
+              <a:rPr sz="1400" b="0" i="0">
+                <a:solidFill>
+                  <a:srgbClr val="595959"/>
+                </a:solidFill>
+                <a:latin typeface="Arial"/>
+              </a:rPr>
+              <a:t>Casas, chácaras e uso diário</a:t>
+            </a:r>
+          </a:p>
+        </p:txBody>
+      </p:sp>
+      <p:sp>
+        <p:nvSpPr>
+          <p:cNvPr id="13" name="Rounded Rectangle 12"/>
+          <p:cNvSpPr/>
+          <p:nvPr/>
+        </p:nvSpPr>
+        <p:spPr>
+          <a:xfrm>
+            <a:off x="2743200" y="5669280"/>
+            <a:ext cx="6675120" cy="731520"/>
+          </a:xfrm>
+          <a:prstGeom prst="roundRect">
+            <a:avLst/>
+          </a:prstGeom>
+          <a:solidFill>
+            <a:srgbClr val="DCEAF7"/>
+          </a:solidFill>
+          <a:ln>
+            <a:solidFill>
+              <a:srgbClr val="DCEAF7"/>
+            </a:solidFill>
+          </a:ln>
+        </p:spPr>
+        <p:style>
+          <a:lnRef idx="1">
+            <a:schemeClr val="accent1"/>
+          </a:lnRef>
+          <a:fillRef idx="3">
+            <a:schemeClr val="accent1"/>
+          </a:fillRef>
+          <a:effectRef idx="2">
+            <a:schemeClr val="accent1"/>
+          </a:effectRef>
+          <a:fontRef idx="minor">
+            <a:schemeClr val="lt1"/>
+          </a:fontRef>
+        </p:style>
+        <p:txBody>
+          <a:bodyPr rtlCol="0" anchor="ctr" wrap="square" lIns="73152" rIns="73152"/>
+          <a:lstStyle/>
+          <a:p>
+            <a:pPr algn="ctr"/>
+            <a:r>
+              <a:rPr sz="1700" b="1">
+                <a:solidFill>
+                  <a:srgbClr val="1E3A5F"/>
+                </a:solidFill>
+                <a:latin typeface="Arial"/>
+              </a:rPr>
+              <a:t>1 a 2 pessoas por ciclo · foco em consumo humano direto</a:t>
+            </a:r>
+          </a:p>
+        </p:txBody>
+      </p:sp>
+      <p:sp>
+        <p:nvSpPr>
+          <p:cNvPr id="14" name="TextBox 13"/>
+          <p:cNvSpPr txBox="1"/>
+          <p:nvPr/>
+        </p:nvSpPr>
+        <p:spPr>
+          <a:xfrm>
+            <a:off x="457200" y="6537960"/>
+            <a:ext cx="9144000" cy="228600"/>
+          </a:xfrm>
+          <a:prstGeom prst="rect">
+            <a:avLst/>
+          </a:prstGeom>
+          <a:noFill/>
+        </p:spPr>
+        <p:txBody>
+          <a:bodyPr wrap="square" lIns="45720" rIns="45720" tIns="18288" bIns="18288">
+            <a:spAutoFit/>
+          </a:bodyPr>
+          <a:lstStyle/>
+          <a:p>
+            <a:pPr algn="l"/>
+            <a:r>
+              <a:rPr sz="800" b="0" i="0">
+                <a:solidFill>
+                  <a:srgbClr val="595959"/>
+                </a:solidFill>
+                <a:latin typeface="Arial"/>
+              </a:rPr>
+              <a:t>Tupan, Máquina de Chuva | PUC-MG Engenharia de Computação</a:t>
+            </a:r>
+          </a:p>
+        </p:txBody>
+      </p:sp>
+      <p:sp>
+        <p:nvSpPr>
+          <p:cNvPr id="15" name="TextBox 14"/>
+          <p:cNvSpPr txBox="1"/>
+          <p:nvPr/>
+        </p:nvSpPr>
+        <p:spPr>
+          <a:xfrm>
+            <a:off x="11338560" y="6537960"/>
+            <a:ext cx="365760" cy="228600"/>
+          </a:xfrm>
+          <a:prstGeom prst="rect">
+            <a:avLst/>
+          </a:prstGeom>
+          <a:noFill/>
+        </p:spPr>
+        <p:txBody>
+          <a:bodyPr wrap="square" lIns="45720" rIns="45720" tIns="18288" bIns="18288">
+            <a:spAutoFit/>
+          </a:bodyPr>
+          <a:lstStyle/>
+          <a:p>
+            <a:pPr algn="r"/>
+            <a:r>
+              <a:rPr sz="800" b="0" i="0">
+                <a:solidFill>
+                  <a:srgbClr val="595959"/>
+                </a:solidFill>
+                <a:latin typeface="Arial"/>
+              </a:rPr>
+              <a:t>17</a:t>
+            </a:r>
+          </a:p>
+        </p:txBody>
+      </p:sp>
+    </p:spTree>
+  </p:cSld>
+  <p:clrMapOvr>
+    <a:masterClrMapping/>
+  </p:clrMapOvr>
+</p:sld>
+</file>
+
+<file path=ppt/slides/slide18.xml><?xml version="1.0" encoding="utf-8"?>
 <p:sld xmlns:a="http://schemas.openxmlformats.org/drawingml/2006/main" xmlns:p="http://schemas.openxmlformats.org/presentationml/2006/main" xmlns:r="http://schemas.openxmlformats.org/officeDocument/2006/relationships">
   <p:cSld>
     <p:bg>
@@ -7248,7 +7593,7 @@
                 </a:solidFill>
                 <a:latin typeface="Arial"/>
               </a:rPr>
-              <a:t>17</a:t>
+              <a:t>18</a:t>
             </a:r>
           </a:p>
         </p:txBody>
